--- a/Case Study 1.pptx
+++ b/Case Study 1.pptx
@@ -5,7 +5,7 @@
     <p:sldMasterId id="2147483673" r:id="rId1"/>
   </p:sldMasterIdLst>
   <p:notesMasterIdLst>
-    <p:notesMasterId r:id="rId17"/>
+    <p:notesMasterId r:id="rId18"/>
   </p:notesMasterIdLst>
   <p:sldIdLst>
     <p:sldId id="256" r:id="rId2"/>
@@ -23,6 +23,7 @@
     <p:sldId id="268" r:id="rId14"/>
     <p:sldId id="271" r:id="rId15"/>
     <p:sldId id="270" r:id="rId16"/>
+    <p:sldId id="272" r:id="rId17"/>
   </p:sldIdLst>
   <p:sldSz cx="12192000" cy="6858000"/>
   <p:notesSz cx="6858000" cy="9144000"/>
@@ -211,7 +212,7 @@
           <a:p>
             <a:fld id="{99F330D2-014D-9D40-8862-FDF6524CDE2A}" type="datetimeFigureOut">
               <a:rPr lang="en-US" smtClean="0"/>
-              <a:t>10/24/26</a:t>
+              <a:t>10/25/26</a:t>
             </a:fld>
             <a:endParaRPr lang="en-US"/>
           </a:p>
@@ -1260,7 +1261,7 @@
           <a:p>
             <a:fld id="{C128FA71-3A18-48C0-980F-4B68F7F63042}" type="datetime1">
               <a:rPr lang="en-US" smtClean="0"/>
-              <a:t>10/24/26</a:t>
+              <a:t>10/25/26</a:t>
             </a:fld>
             <a:endParaRPr lang="en-US"/>
           </a:p>
@@ -1468,7 +1469,7 @@
           <a:p>
             <a:fld id="{7104EDB3-C0E8-45F8-9E1D-1B6C8D1880C0}" type="datetime1">
               <a:rPr lang="en-US" smtClean="0"/>
-              <a:t>10/24/26</a:t>
+              <a:t>10/25/26</a:t>
             </a:fld>
             <a:endParaRPr lang="en-US"/>
           </a:p>
@@ -1678,7 +1679,7 @@
           <a:p>
             <a:fld id="{9CF0EC4B-54ED-4041-B552-9BA760FA3DBA}" type="datetime1">
               <a:rPr lang="en-US" smtClean="0"/>
-              <a:t>10/24/26</a:t>
+              <a:t>10/25/26</a:t>
             </a:fld>
             <a:endParaRPr lang="en-US"/>
           </a:p>
@@ -1876,7 +1877,7 @@
           <a:p>
             <a:fld id="{51C1210E-201E-4473-82AC-2466F5386C38}" type="datetime1">
               <a:rPr lang="en-US" smtClean="0"/>
-              <a:t>10/24/26</a:t>
+              <a:t>10/25/26</a:t>
             </a:fld>
             <a:endParaRPr lang="en-US"/>
           </a:p>
@@ -2154,7 +2155,7 @@
           <a:p>
             <a:fld id="{B01EA198-6CAB-4B8F-B93F-1F9C8C4B6CE7}" type="datetime1">
               <a:rPr lang="en-US" smtClean="0"/>
-              <a:t>10/24/26</a:t>
+              <a:t>10/25/26</a:t>
             </a:fld>
             <a:endParaRPr lang="en-US"/>
           </a:p>
@@ -2426,7 +2427,7 @@
           <a:p>
             <a:fld id="{CA06041F-4525-44D5-AA4F-332294BF1F56}" type="datetime1">
               <a:rPr lang="en-US" smtClean="0"/>
-              <a:t>10/24/26</a:t>
+              <a:t>10/25/26</a:t>
             </a:fld>
             <a:endParaRPr lang="en-US"/>
           </a:p>
@@ -2850,7 +2851,7 @@
           <a:p>
             <a:fld id="{F9557091-BBDF-4EB9-BA6B-2BB67AC4FC0F}" type="datetime1">
               <a:rPr lang="en-US" smtClean="0"/>
-              <a:t>10/24/26</a:t>
+              <a:t>10/25/26</a:t>
             </a:fld>
             <a:endParaRPr lang="en-US"/>
           </a:p>
@@ -2991,7 +2992,7 @@
           <a:p>
             <a:fld id="{2D6B226B-77A6-410C-9796-083F278E0125}" type="datetime1">
               <a:rPr lang="en-US" smtClean="0"/>
-              <a:t>10/24/26</a:t>
+              <a:t>10/25/26</a:t>
             </a:fld>
             <a:endParaRPr lang="en-US"/>
           </a:p>
@@ -3104,7 +3105,7 @@
           <a:p>
             <a:fld id="{A23A578B-D289-4C40-8593-3D356C49DA58}" type="datetime1">
               <a:rPr lang="en-US" smtClean="0"/>
-              <a:t>10/24/26</a:t>
+              <a:t>10/25/26</a:t>
             </a:fld>
             <a:endParaRPr lang="en-US"/>
           </a:p>
@@ -3423,7 +3424,7 @@
           <a:p>
             <a:fld id="{713DFAE3-14DB-48A7-A80F-80DDB072CE3D}" type="datetime1">
               <a:rPr lang="en-US" smtClean="0"/>
-              <a:t>10/24/26</a:t>
+              <a:t>10/25/26</a:t>
             </a:fld>
             <a:endParaRPr lang="en-US"/>
           </a:p>
@@ -3717,7 +3718,7 @@
           <a:p>
             <a:fld id="{92C5EAEF-6478-4102-8F5D-A5FE9FC97ACB}" type="datetime1">
               <a:rPr lang="en-US" smtClean="0"/>
-              <a:t>10/24/26</a:t>
+              <a:t>10/25/26</a:t>
             </a:fld>
             <a:endParaRPr lang="en-US"/>
           </a:p>
@@ -3958,7 +3959,7 @@
           <a:p>
             <a:fld id="{67F45AC6-C491-4585-A584-9CE2AF7D5500}" type="datetime1">
               <a:rPr lang="en-US" smtClean="0"/>
-              <a:t>10/24/26</a:t>
+              <a:t>10/25/26</a:t>
             </a:fld>
             <a:endParaRPr lang="en-US"/>
           </a:p>
@@ -6140,6 +6141,108 @@
     <p:extLst>
       <p:ext uri="{BB962C8B-B14F-4D97-AF65-F5344CB8AC3E}">
         <p14:creationId xmlns:p14="http://schemas.microsoft.com/office/powerpoint/2010/main" val="3864002762"/>
+      </p:ext>
+    </p:extLst>
+  </p:cSld>
+  <p:clrMapOvr>
+    <a:masterClrMapping/>
+  </p:clrMapOvr>
+</p:sld>
+</file>
+
+<file path=ppt/slides/slide16.xml><?xml version="1.0" encoding="utf-8"?>
+<p:sld xmlns:a="http://schemas.openxmlformats.org/drawingml/2006/main" xmlns:r="http://schemas.openxmlformats.org/officeDocument/2006/relationships" xmlns:p="http://schemas.openxmlformats.org/presentationml/2006/main">
+  <p:cSld>
+    <p:spTree>
+      <p:nvGrpSpPr>
+        <p:cNvPr id="1" name=""/>
+        <p:cNvGrpSpPr/>
+        <p:nvPr/>
+      </p:nvGrpSpPr>
+      <p:grpSpPr>
+        <a:xfrm>
+          <a:off x="0" y="0"/>
+          <a:ext cx="0" cy="0"/>
+          <a:chOff x="0" y="0"/>
+          <a:chExt cx="0" cy="0"/>
+        </a:xfrm>
+      </p:grpSpPr>
+      <p:sp>
+        <p:nvSpPr>
+          <p:cNvPr id="2" name="Title 1">
+            <a:extLst>
+              <a:ext uri="{FF2B5EF4-FFF2-40B4-BE49-F238E27FC236}">
+                <a16:creationId xmlns:a16="http://schemas.microsoft.com/office/drawing/2014/main" id="{E5FC3FAF-EC5B-4043-3AD5-AAD5E6D1F5BA}"/>
+              </a:ext>
+            </a:extLst>
+          </p:cNvPr>
+          <p:cNvSpPr>
+            <a:spLocks noGrp="1"/>
+          </p:cNvSpPr>
+          <p:nvPr>
+            <p:ph type="title"/>
+          </p:nvPr>
+        </p:nvSpPr>
+        <p:spPr/>
+        <p:txBody>
+          <a:bodyPr/>
+          <a:lstStyle/>
+          <a:p>
+            <a:r>
+              <a:rPr lang="en-US" dirty="0"/>
+              <a:t>GitHub Link</a:t>
+            </a:r>
+          </a:p>
+        </p:txBody>
+      </p:sp>
+      <p:sp>
+        <p:nvSpPr>
+          <p:cNvPr id="3" name="Content Placeholder 2">
+            <a:extLst>
+              <a:ext uri="{FF2B5EF4-FFF2-40B4-BE49-F238E27FC236}">
+                <a16:creationId xmlns:a16="http://schemas.microsoft.com/office/drawing/2014/main" id="{5610ADA1-7D1B-4715-4CA8-678CD4126C2F}"/>
+              </a:ext>
+            </a:extLst>
+          </p:cNvPr>
+          <p:cNvSpPr>
+            <a:spLocks noGrp="1"/>
+          </p:cNvSpPr>
+          <p:nvPr>
+            <p:ph idx="1"/>
+          </p:nvPr>
+        </p:nvSpPr>
+        <p:spPr/>
+        <p:txBody>
+          <a:bodyPr/>
+          <a:lstStyle/>
+          <a:p>
+            <a:r>
+              <a:rPr lang="en-US" dirty="0"/>
+              <a:t>https://</a:t>
+            </a:r>
+            <a:r>
+              <a:rPr lang="en-US" dirty="0" err="1"/>
+              <a:t>github.com</a:t>
+            </a:r>
+            <a:r>
+              <a:rPr lang="en-US" dirty="0"/>
+              <a:t>/</a:t>
+            </a:r>
+            <a:r>
+              <a:rPr lang="en-US" dirty="0" err="1"/>
+              <a:t>javontestarling-msds</a:t>
+            </a:r>
+            <a:r>
+              <a:rPr lang="en-US" dirty="0"/>
+              <a:t>/CaseStudy1DDS/tree/main</a:t>
+            </a:r>
+          </a:p>
+        </p:txBody>
+      </p:sp>
+    </p:spTree>
+    <p:extLst>
+      <p:ext uri="{BB962C8B-B14F-4D97-AF65-F5344CB8AC3E}">
+        <p14:creationId xmlns:p14="http://schemas.microsoft.com/office/powerpoint/2010/main" val="1621011915"/>
       </p:ext>
     </p:extLst>
   </p:cSld>
